--- a/Education/Lecture Series/Quant Archive F25/Quant Week 2.pptx
+++ b/Education/Lecture Series/Quant Archive F25/Quant Week 2.pptx
@@ -10936,7 +10936,7 @@
             </a:pPr>
             <a:r>
               <a:rPr lang="en"/>
-              <a:t>Quant Week 4</a:t>
+              <a:t>Quant Week 2</a:t>
             </a:r>
             <a:endParaRPr/>
           </a:p>
